--- a/website/static/2026/verified-dataflow-compilation/wavelet-circuit.pptx
+++ b/website/static/2026/verified-dataflow-compilation/wavelet-circuit.pptx
@@ -3036,14 +3036,14 @@
               <p:cNvCxnSpPr>
                 <a:cxnSpLocks/>
                 <a:stCxn id="98" idx="3"/>
-                <a:endCxn id="101" idx="3"/>
+                <a:endCxn id="100" idx="5"/>
               </p:cNvCxnSpPr>
               <p:nvPr/>
             </p:nvCxnSpPr>
             <p:spPr>
               <a:xfrm flipH="1">
-                <a:off x="8745921" y="3835332"/>
-                <a:ext cx="373918" cy="337150"/>
+                <a:off x="8649044" y="3835332"/>
+                <a:ext cx="470795" cy="268812"/>
               </a:xfrm>
               <a:prstGeom prst="straightConnector1">
                 <a:avLst/>
@@ -3376,9 +3376,9 @@
             <p:grpSpPr>
               <a:xfrm>
                 <a:off x="8269818" y="3886199"/>
-                <a:ext cx="505634" cy="498026"/>
+                <a:ext cx="505634" cy="495952"/>
                 <a:chOff x="2587877" y="3400906"/>
-                <a:chExt cx="505634" cy="498026"/>
+                <a:chExt cx="505634" cy="495952"/>
               </a:xfrm>
             </p:grpSpPr>
             <p:sp>
@@ -3449,7 +3449,7 @@
               </p:nvSpPr>
               <p:spPr>
                 <a:xfrm>
-                  <a:off x="2630114" y="3475447"/>
+                  <a:off x="2629340" y="3473373"/>
                   <a:ext cx="433866" cy="423485"/>
                 </a:xfrm>
                 <a:prstGeom prst="rect">
